--- a/exports/quarto/pptx/11_GlossaryAndDefinitions.pptx
+++ b/exports/quarto/pptx/11_GlossaryAndDefinitions.pptx
@@ -3183,7 +3183,7 @@
             </a:pPr>
             <a:r>
               <a:rPr/>
-              <a:t>March 31, 2026</a:t>
+              <a:t>April 2, 2026</a:t>
             </a:r>
           </a:p>
         </p:txBody>
@@ -4601,12 +4601,25 @@
           <a:bodyPr/>
           <a:lstStyle/>
           <a:p>
-            <a:pPr lvl="0" indent="0" marL="0">
-              <a:buNone/>
-            </a:pPr>
-            <a:r>
-              <a:rPr/>
-              <a:t>The glossary includes the frozen definitions of the Seven Core Concepts:</a:t>
+            <a:pPr lvl="0" indent="0" marL="1270000">
+              <a:buNone/>
+            </a:pPr>
+            <a:r>
+              <a:rPr sz="2000" b="1"/>
+              <a:t>Single Source of Truth (SSOT):</a:t>
+            </a:r>
+            <a:r>
+              <a:rPr sz="2000"/>
+              <a:t> The README.md is the authoritative origin for all canonical definitions.</a:t>
+            </a:r>
+          </a:p>
+          <a:p>
+            <a:pPr lvl="0" indent="0" marL="0">
+              <a:buNone/>
+            </a:pPr>
+            <a:r>
+              <a:rPr/>
+              <a:t>The glossary includes the frozen definitions of the Eight Core Concepts:</a:t>
             </a:r>
           </a:p>
           <a:p>
